--- a/PPTs/Ch2_Data_Representation_Exercises ANS.pptx
+++ b/PPTs/Ch2_Data_Representation_Exercises ANS.pptx
@@ -154,9 +154,53 @@
 <file path=ppt/revisionInfo.xml><?xml version="1.0" encoding="utf-8"?>
 <p1510:revInfo xmlns:a="http://schemas.openxmlformats.org/drawingml/2006/main" xmlns:r="http://schemas.openxmlformats.org/officeDocument/2006/relationships" xmlns:p1510="http://schemas.microsoft.com/office/powerpoint/2015/10/main">
   <p1510:revLst>
-    <p1510:client id="{B669D951-BA3F-437E-9716-74EDD83D17BB}" v="2" dt="2025-12-30T22:36:53.489"/>
+    <p1510:client id="{74E9662D-2748-4411-A048-4BC33D32B5DB}" v="1" dt="2026-02-05T15:08:07.217"/>
   </p1510:revLst>
 </p1510:revInfo>
+</file>
+
+<file path=ppt/changesInfos/changesInfo1.xml><?xml version="1.0" encoding="utf-8"?>
+<pc:chgInfo xmlns:a="http://schemas.openxmlformats.org/drawingml/2006/main" xmlns:r="http://schemas.openxmlformats.org/officeDocument/2006/relationships" xmlns:ac="http://schemas.microsoft.com/office/drawing/2013/main/command" xmlns:pc="http://schemas.microsoft.com/office/powerpoint/2013/main/command">
+  <pc:docChgLst>
+    <pc:chgData name="Zonghua Gu" userId="9a7e1853e1951ef5" providerId="LiveId" clId="{CF1FAA12-072C-4ED5-BA76-0FFFAEFDB88A}"/>
+    <pc:docChg chg="modSld">
+      <pc:chgData name="Zonghua Gu" userId="9a7e1853e1951ef5" providerId="LiveId" clId="{CF1FAA12-072C-4ED5-BA76-0FFFAEFDB88A}" dt="2026-02-05T15:08:07.216" v="2"/>
+      <pc:docMkLst>
+        <pc:docMk/>
+      </pc:docMkLst>
+      <pc:sldChg chg="modSp mod">
+        <pc:chgData name="Zonghua Gu" userId="9a7e1853e1951ef5" providerId="LiveId" clId="{CF1FAA12-072C-4ED5-BA76-0FFFAEFDB88A}" dt="2026-02-05T15:04:40.861" v="0" actId="108"/>
+        <pc:sldMkLst>
+          <pc:docMk/>
+          <pc:sldMk cId="3239216658" sldId="365"/>
+        </pc:sldMkLst>
+        <pc:spChg chg="mod">
+          <ac:chgData name="Zonghua Gu" userId="9a7e1853e1951ef5" providerId="LiveId" clId="{CF1FAA12-072C-4ED5-BA76-0FFFAEFDB88A}" dt="2026-02-05T15:04:40.861" v="0" actId="108"/>
+          <ac:spMkLst>
+            <pc:docMk/>
+            <pc:sldMk cId="3239216658" sldId="365"/>
+            <ac:spMk id="3" creationId="{00000000-0000-0000-0000-000000000000}"/>
+          </ac:spMkLst>
+        </pc:spChg>
+      </pc:sldChg>
+      <pc:sldChg chg="modSp mod modAnim">
+        <pc:chgData name="Zonghua Gu" userId="9a7e1853e1951ef5" providerId="LiveId" clId="{CF1FAA12-072C-4ED5-BA76-0FFFAEFDB88A}" dt="2026-02-05T15:08:07.216" v="2"/>
+        <pc:sldMkLst>
+          <pc:docMk/>
+          <pc:sldMk cId="3413348423" sldId="367"/>
+        </pc:sldMkLst>
+        <pc:graphicFrameChg chg="mod">
+          <ac:chgData name="Zonghua Gu" userId="9a7e1853e1951ef5" providerId="LiveId" clId="{CF1FAA12-072C-4ED5-BA76-0FFFAEFDB88A}" dt="2026-02-05T15:07:44.409" v="1" actId="1076"/>
+          <ac:graphicFrameMkLst>
+            <pc:docMk/>
+            <pc:sldMk cId="3413348423" sldId="367"/>
+            <ac:graphicFrameMk id="4" creationId="{E675A2F8-1917-E32A-1D6F-9612FFD62311}"/>
+          </ac:graphicFrameMkLst>
+        </pc:graphicFrameChg>
+      </pc:sldChg>
+    </pc:docChg>
+  </pc:docChgLst>
+</pc:chgInfo>
 </file>
 
 <file path=ppt/handoutMasters/handoutMaster1.xml><?xml version="1.0" encoding="utf-8"?>
@@ -242,7 +286,7 @@
             <a:fld id="{BD4F56A7-3CDE-194F-B9AF-D598FBBF1989}" type="datetimeFigureOut">
               <a:rPr lang="en-US" smtClean="0"/>
               <a:pPr/>
-              <a:t>12/30/2025</a:t>
+              <a:t>2/5/2026</a:t>
             </a:fld>
             <a:endParaRPr lang="en-US"/>
           </a:p>
@@ -410,7 +454,7 @@
             <a:fld id="{1E52AD58-60CE-E948-9CBA-0BD7030FC28E}" type="datetimeFigureOut">
               <a:rPr lang="en-US" smtClean="0"/>
               <a:pPr/>
-              <a:t>12/30/2025</a:t>
+              <a:t>2/5/2026</a:t>
             </a:fld>
             <a:endParaRPr lang="en-US"/>
           </a:p>
@@ -1429,6 +1473,91 @@
 </p:notes>
 </file>
 
+<file path=ppt/notesSlides/notesSlide6.xml><?xml version="1.0" encoding="utf-8"?>
+<p:notes xmlns:a="http://schemas.openxmlformats.org/drawingml/2006/main" xmlns:r="http://schemas.openxmlformats.org/officeDocument/2006/relationships" xmlns:p="http://schemas.openxmlformats.org/presentationml/2006/main">
+  <p:cSld>
+    <p:spTree>
+      <p:nvGrpSpPr>
+        <p:cNvPr id="1" name=""/>
+        <p:cNvGrpSpPr/>
+        <p:nvPr/>
+      </p:nvGrpSpPr>
+      <p:grpSpPr>
+        <a:xfrm>
+          <a:off x="0" y="0"/>
+          <a:ext cx="0" cy="0"/>
+          <a:chOff x="0" y="0"/>
+          <a:chExt cx="0" cy="0"/>
+        </a:xfrm>
+      </p:grpSpPr>
+      <p:sp>
+        <p:nvSpPr>
+          <p:cNvPr id="2" name="Slide Image Placeholder 1"/>
+          <p:cNvSpPr>
+            <a:spLocks noGrp="1" noRot="1" noChangeAspect="1"/>
+          </p:cNvSpPr>
+          <p:nvPr>
+            <p:ph type="sldImg"/>
+          </p:nvPr>
+        </p:nvSpPr>
+        <p:spPr/>
+      </p:sp>
+      <p:sp>
+        <p:nvSpPr>
+          <p:cNvPr id="3" name="Notes Placeholder 2"/>
+          <p:cNvSpPr>
+            <a:spLocks noGrp="1"/>
+          </p:cNvSpPr>
+          <p:nvPr>
+            <p:ph type="body" idx="1"/>
+          </p:nvPr>
+        </p:nvSpPr>
+        <p:spPr/>
+        <p:txBody>
+          <a:bodyPr/>
+          <a:lstStyle/>
+          <a:p>
+            <a:endParaRPr lang="en-US" dirty="0"/>
+          </a:p>
+        </p:txBody>
+      </p:sp>
+      <p:sp>
+        <p:nvSpPr>
+          <p:cNvPr id="4" name="Slide Number Placeholder 3"/>
+          <p:cNvSpPr>
+            <a:spLocks noGrp="1"/>
+          </p:cNvSpPr>
+          <p:nvPr>
+            <p:ph type="sldNum" sz="quarter" idx="5"/>
+          </p:nvPr>
+        </p:nvSpPr>
+        <p:spPr/>
+        <p:txBody>
+          <a:bodyPr/>
+          <a:lstStyle/>
+          <a:p>
+            <a:fld id="{D624DF53-3DD3-9F45-9E7E-472B96F1AB81}" type="slidenum">
+              <a:rPr lang="en-US" smtClean="0"/>
+              <a:pPr/>
+              <a:t>17</a:t>
+            </a:fld>
+            <a:endParaRPr lang="en-US"/>
+          </a:p>
+        </p:txBody>
+      </p:sp>
+    </p:spTree>
+    <p:extLst>
+      <p:ext uri="{BB962C8B-B14F-4D97-AF65-F5344CB8AC3E}">
+        <p14:creationId xmlns:p14="http://schemas.microsoft.com/office/powerpoint/2010/main" val="1546047984"/>
+      </p:ext>
+    </p:extLst>
+  </p:cSld>
+  <p:clrMapOvr>
+    <a:masterClrMapping/>
+  </p:clrMapOvr>
+</p:notes>
+</file>
+
 <file path=ppt/slideLayouts/slideLayout1.xml><?xml version="1.0" encoding="utf-8"?>
 <p:sldLayout xmlns:a="http://schemas.openxmlformats.org/drawingml/2006/main" xmlns:r="http://schemas.openxmlformats.org/officeDocument/2006/relationships" xmlns:p="http://schemas.openxmlformats.org/presentationml/2006/main" showMasterSp="0" type="title" preserve="1">
   <p:cSld name="Title Slide">
@@ -1571,7 +1700,7 @@
             <a:pPr eaLnBrk="1" latinLnBrk="0" hangingPunct="1"/>
             <a:fld id="{8E8B2B42-CBC2-7D4E-BA50-0E7F29B4DAAB}" type="datetime1">
               <a:rPr lang="en-US" smtClean="0"/>
-              <a:t>12/30/2025</a:t>
+              <a:t>2/5/2026</a:t>
             </a:fld>
             <a:endParaRPr lang="en-US" sz="1600" dirty="0"/>
           </a:p>
@@ -1931,7 +2060,7 @@
             <a:pPr eaLnBrk="1" latinLnBrk="0" hangingPunct="1"/>
             <a:fld id="{597D1259-3A46-254C-ADDB-B5DA4F1DF3DA}" type="datetime1">
               <a:rPr lang="en-US" smtClean="0"/>
-              <a:t>12/30/2025</a:t>
+              <a:t>2/5/2026</a:t>
             </a:fld>
             <a:endParaRPr lang="en-US"/>
           </a:p>
@@ -2107,7 +2236,7 @@
             <a:pPr eaLnBrk="1" latinLnBrk="0" hangingPunct="1"/>
             <a:fld id="{CCA104EC-54AA-E04F-BDC0-22B4E8892699}" type="datetime1">
               <a:rPr lang="en-US" smtClean="0"/>
-              <a:t>12/30/2025</a:t>
+              <a:t>2/5/2026</a:t>
             </a:fld>
             <a:endParaRPr lang="en-US"/>
           </a:p>
@@ -2343,7 +2472,7 @@
             <a:pPr eaLnBrk="1" latinLnBrk="0" hangingPunct="1"/>
             <a:fld id="{A9E6F060-20EB-3246-9088-08BF5F1271DE}" type="datetime1">
               <a:rPr lang="en-US" smtClean="0"/>
-              <a:t>12/30/2025</a:t>
+              <a:t>2/5/2026</a:t>
             </a:fld>
             <a:endParaRPr lang="en-US" dirty="0"/>
           </a:p>
@@ -2613,7 +2742,7 @@
             <a:pPr eaLnBrk="1" latinLnBrk="0" hangingPunct="1"/>
             <a:fld id="{34C82E41-DA7E-CA4C-823B-C759BEA16CE8}" type="datetime1">
               <a:rPr lang="en-US" smtClean="0"/>
-              <a:t>12/30/2025</a:t>
+              <a:t>2/5/2026</a:t>
             </a:fld>
             <a:endParaRPr lang="en-US" dirty="0"/>
           </a:p>
@@ -2834,7 +2963,7 @@
             <a:pPr eaLnBrk="1" latinLnBrk="0" hangingPunct="1"/>
             <a:fld id="{2500C8B0-EB1A-0A41-B839-C4B99CD2225A}" type="datetime1">
               <a:rPr lang="en-US" smtClean="0"/>
-              <a:t>12/30/2025</a:t>
+              <a:t>2/5/2026</a:t>
             </a:fld>
             <a:endParaRPr lang="en-US"/>
           </a:p>
@@ -3187,7 +3316,7 @@
             <a:pPr eaLnBrk="1" latinLnBrk="0" hangingPunct="1"/>
             <a:fld id="{4F16605B-D952-1149-A111-28A5633BAE48}" type="datetime1">
               <a:rPr lang="en-US" smtClean="0"/>
-              <a:t>12/30/2025</a:t>
+              <a:t>2/5/2026</a:t>
             </a:fld>
             <a:endParaRPr lang="en-US"/>
           </a:p>
@@ -3420,7 +3549,7 @@
             <a:pPr eaLnBrk="1" latinLnBrk="0" hangingPunct="1"/>
             <a:fld id="{91109A1C-29B2-B04E-8365-C9D22C4AE842}" type="datetime1">
               <a:rPr lang="en-US" smtClean="0"/>
-              <a:t>12/30/2025</a:t>
+              <a:t>2/5/2026</a:t>
             </a:fld>
             <a:endParaRPr lang="en-US"/>
           </a:p>
@@ -3562,7 +3691,7 @@
             <a:pPr eaLnBrk="1" latinLnBrk="0" hangingPunct="1"/>
             <a:fld id="{2CE417B6-A42B-064A-8677-46C55C4F613A}" type="datetime1">
               <a:rPr lang="en-US" smtClean="0"/>
-              <a:t>12/30/2025</a:t>
+              <a:t>2/5/2026</a:t>
             </a:fld>
             <a:endParaRPr lang="en-US"/>
           </a:p>
@@ -3840,7 +3969,7 @@
             <a:pPr eaLnBrk="1" latinLnBrk="0" hangingPunct="1"/>
             <a:fld id="{DE76F5AD-3F1F-7141-BC8A-012C5728BE2D}" type="datetime1">
               <a:rPr lang="en-US" smtClean="0"/>
-              <a:t>12/30/2025</a:t>
+              <a:t>2/5/2026</a:t>
             </a:fld>
             <a:endParaRPr lang="en-US"/>
           </a:p>
@@ -4248,7 +4377,7 @@
             <a:pPr eaLnBrk="1" latinLnBrk="0" hangingPunct="1"/>
             <a:fld id="{09FA12B8-739E-4D47-A14C-180C3BC10865}" type="datetime1">
               <a:rPr lang="en-US" smtClean="0"/>
-              <a:t>12/30/2025</a:t>
+              <a:t>2/5/2026</a:t>
             </a:fld>
             <a:endParaRPr lang="en-US"/>
           </a:p>
@@ -4586,7 +4715,7 @@
             <a:pPr eaLnBrk="1" latinLnBrk="0" hangingPunct="1"/>
             <a:fld id="{CDD18CD8-E404-844E-A4BD-DF69B8E5881E}" type="datetime1">
               <a:rPr lang="en-US" smtClean="0"/>
-              <a:t>12/30/2025</a:t>
+              <a:t>2/5/2026</a:t>
             </a:fld>
             <a:endParaRPr lang="en-US" sz="1400" dirty="0">
               <a:solidFill>
@@ -5367,7 +5496,7 @@
           <a:p>
             <a:r>
               <a:rPr lang="en-US" dirty="0"/>
-              <a:t>Which range of decimals can be expressed with a 6-bit number (assuming </a:t>
+              <a:t>Which range of decimals can be expressed with a 6-bit signed integer (assuming </a:t>
             </a:r>
             <a:r>
               <a:rPr lang="en-US" altLang="zh-CN" dirty="0"/>
@@ -5410,7 +5539,7 @@
               <a:pPr defTabSz="342900">
                 <a:defRPr/>
               </a:pPr>
-              <a:t>12/30/2025</a:t>
+              <a:t>2/5/2026</a:t>
             </a:fld>
             <a:endParaRPr lang="en-US" sz="900">
               <a:solidFill>
@@ -5928,7 +6057,7 @@
           <a:p>
             <a:r>
               <a:rPr lang="en-US" dirty="0"/>
-              <a:t>Which range of decimals can be expressed with a 6-bit number (assuming </a:t>
+              <a:t>Which range of decimals can be expressed with a 6-bit signed integer (assuming </a:t>
             </a:r>
             <a:r>
               <a:rPr lang="en-US" altLang="zh-CN" dirty="0"/>
@@ -5971,7 +6100,7 @@
               <a:pPr defTabSz="342900">
                 <a:defRPr/>
               </a:pPr>
-              <a:t>12/30/2025</a:t>
+              <a:t>2/5/2026</a:t>
             </a:fld>
             <a:endParaRPr lang="en-US" sz="900">
               <a:solidFill>
@@ -6471,8 +6600,8 @@
           </a:p>
         </p:txBody>
       </p:sp>
-      <mc:AlternateContent xmlns:mc="http://schemas.openxmlformats.org/markup-compatibility/2006">
-        <mc:Choice xmlns:a14="http://schemas.microsoft.com/office/drawing/2010/main" Requires="a14">
+      <mc:AlternateContent xmlns:mc="http://schemas.openxmlformats.org/markup-compatibility/2006" xmlns:a14="http://schemas.microsoft.com/office/drawing/2010/main">
+        <mc:Choice Requires="a14">
           <p:sp>
             <p:nvSpPr>
               <p:cNvPr id="9" name="Rectangle 8"/>
@@ -6719,7 +6848,7 @@
             </p:txBody>
           </p:sp>
         </mc:Choice>
-        <mc:Fallback>
+        <mc:Fallback xmlns="">
           <p:sp>
             <p:nvSpPr>
               <p:cNvPr id="9" name="Rectangle 8"/>
@@ -6994,7 +7123,7 @@
               <a:pPr defTabSz="342900">
                 <a:defRPr/>
               </a:pPr>
-              <a:t>12/30/2025</a:t>
+              <a:t>2/5/2026</a:t>
             </a:fld>
             <a:endParaRPr lang="en-US" sz="900">
               <a:solidFill>
@@ -7197,7 +7326,13 @@
       </p:sp>
       <p:graphicFrame>
         <p:nvGraphicFramePr>
-          <p:cNvPr id="7" name="Table 6"/>
+          <p:cNvPr id="10" name="Table 9">
+            <a:extLst>
+              <a:ext uri="{FF2B5EF4-FFF2-40B4-BE49-F238E27FC236}">
+                <a16:creationId xmlns:a16="http://schemas.microsoft.com/office/drawing/2014/main" id="{DE5BA060-B117-DE6C-2E5D-AB4FD225142F}"/>
+              </a:ext>
+            </a:extLst>
+          </p:cNvPr>
           <p:cNvGraphicFramePr>
             <a:graphicFrameLocks noGrp="1"/>
           </p:cNvGraphicFramePr>
@@ -7427,7 +7562,7 @@
                       <a:pPr algn="ctr"/>
                       <a:r>
                         <a:rPr lang="en-US" sz="1800" dirty="0"/>
-                        <a:t>-32 … 31</a:t>
+                        <a:t>   0 … 63</a:t>
                       </a:r>
                     </a:p>
                   </a:txBody>
@@ -7555,7 +7690,7 @@
               <a:pPr defTabSz="342900">
                 <a:defRPr/>
               </a:pPr>
-              <a:t>12/30/2025</a:t>
+              <a:t>2/5/2026</a:t>
             </a:fld>
             <a:endParaRPr lang="en-US" sz="900">
               <a:solidFill>
@@ -8055,8 +8190,8 @@
           </a:p>
         </p:txBody>
       </p:sp>
-      <mc:AlternateContent xmlns:mc="http://schemas.openxmlformats.org/markup-compatibility/2006">
-        <mc:Choice xmlns:a14="http://schemas.microsoft.com/office/drawing/2010/main" Requires="a14">
+      <mc:AlternateContent xmlns:mc="http://schemas.openxmlformats.org/markup-compatibility/2006" xmlns:a14="http://schemas.microsoft.com/office/drawing/2010/main">
+        <mc:Choice Requires="a14">
           <p:sp>
             <p:nvSpPr>
               <p:cNvPr id="9" name="Rectangle 8"/>
@@ -8235,7 +8370,7 @@
             </p:txBody>
           </p:sp>
         </mc:Choice>
-        <mc:Fallback>
+        <mc:Fallback xmlns="">
           <p:sp>
             <p:nvSpPr>
               <p:cNvPr id="9" name="Rectangle 8"/>
@@ -8470,6 +8605,9 @@
               <a:t>Q: What is the result of 1001 + 0011?</a:t>
             </a:r>
           </a:p>
+          <a:p>
+            <a:endParaRPr lang="en-US" dirty="0"/>
+          </a:p>
         </p:txBody>
       </p:sp>
     </p:spTree>
@@ -8699,7 +8837,13 @@
               <a:rPr lang="zh-CN" altLang="en-US" dirty="0"/>
               <a:t>？</a:t>
             </a:r>
-            <a:endParaRPr lang="en-US" dirty="0"/>
+            <a:endParaRPr lang="en-US" altLang="zh-CN" dirty="0"/>
+          </a:p>
+          <a:p>
+            <a:r>
+              <a:rPr lang="en-US" dirty="0"/>
+              <a:t>0001</a:t>
+            </a:r>
           </a:p>
         </p:txBody>
       </p:sp>
@@ -8821,15 +8965,17 @@
           <a:p>
             <a:r>
               <a:rPr lang="en-US" altLang="zh-CN" dirty="0"/>
-              <a:t>A:  A 4-bit unsigned </a:t>
-            </a:r>
-            <a:r>
-              <a:rPr lang="en-US" altLang="zh-CN" dirty="0" err="1"/>
-              <a:t>int</a:t>
-            </a:r>
+              <a:t>A:  </a:t>
+            </a:r>
+            <a:r>
+              <a:rPr lang="en-US" dirty="0"/>
+              <a:t>1011+0110 = 10001; the extra leftmost bit is discarded, so the result is 0001 (1 in decimal) for both cases. </a:t>
+            </a:r>
+          </a:p>
+          <a:p>
             <a:r>
               <a:rPr lang="en-US" altLang="zh-CN" dirty="0"/>
-              <a:t> has the range [0,2</a:t>
+              <a:t>1011 is 11 in decimal as unsigned int; -5 in decimal as signed int; 0110 is 6 as either unsigned or signed int. A 4-bit unsigned int has the range [0,2</a:t>
             </a:r>
             <a:r>
               <a:rPr lang="en-US" altLang="zh-CN" baseline="30000" dirty="0"/>
@@ -8837,15 +8983,7 @@
             </a:r>
             <a:r>
               <a:rPr lang="en-US" altLang="zh-CN" dirty="0"/>
-              <a:t>-1]=[0, 15]; a 4-bit signed </a:t>
-            </a:r>
-            <a:r>
-              <a:rPr lang="en-US" altLang="zh-CN" dirty="0" err="1"/>
-              <a:t>int</a:t>
-            </a:r>
-            <a:r>
-              <a:rPr lang="en-US" altLang="zh-CN" dirty="0"/>
-              <a:t> has the range [-2</a:t>
+              <a:t>-1]=[0, 15]; a 4-bit signed int has the range [-2</a:t>
             </a:r>
             <a:r>
               <a:rPr lang="en-US" altLang="zh-CN" baseline="30000" dirty="0"/>
@@ -8862,34 +9000,6 @@
             <a:r>
               <a:rPr lang="en-US" altLang="zh-CN" dirty="0"/>
               <a:t>-1]=[-8, 7]</a:t>
-            </a:r>
-          </a:p>
-          <a:p>
-            <a:r>
-              <a:rPr lang="en-US" altLang="zh-CN" dirty="0"/>
-              <a:t>1011 is 11 in decimal as unsigned </a:t>
-            </a:r>
-            <a:r>
-              <a:rPr lang="en-US" altLang="zh-CN" dirty="0" err="1"/>
-              <a:t>int</a:t>
-            </a:r>
-            <a:r>
-              <a:rPr lang="en-US" altLang="zh-CN" dirty="0"/>
-              <a:t>; -5 in decimal as signed </a:t>
-            </a:r>
-            <a:r>
-              <a:rPr lang="en-US" altLang="zh-CN" dirty="0" err="1"/>
-              <a:t>int</a:t>
-            </a:r>
-            <a:r>
-              <a:rPr lang="en-US" altLang="zh-CN" dirty="0"/>
-              <a:t>; 0110 is 6 as either unsigned or signed int. </a:t>
-            </a:r>
-          </a:p>
-          <a:p>
-            <a:r>
-              <a:rPr lang="en-US" dirty="0"/>
-              <a:t>1011+0110 = 10001; the extra leftmost bit is discarded, so the result is 0001 (1 in decimal) for both cases. </a:t>
             </a:r>
           </a:p>
           <a:p>
@@ -9839,8 +9949,21 @@
                   <a:srgbClr val="FF0000"/>
                 </a:solidFill>
               </a:rPr>
-              <a:t>False</a:t>
-            </a:r>
+              <a:t>False. </a:t>
+            </a:r>
+            <a:r>
+              <a:rPr lang="en-US" dirty="0"/>
+              <a:t>e.g., </a:t>
+            </a:r>
+            <a:r>
+              <a:rPr lang="en-US" altLang="zh-CN" dirty="0"/>
+              <a:t>[-8, 7] for a 4-bit system</a:t>
+            </a:r>
+            <a:endParaRPr lang="en-US" dirty="0">
+              <a:solidFill>
+                <a:srgbClr val="FF0000"/>
+              </a:solidFill>
+            </a:endParaRPr>
           </a:p>
         </p:txBody>
       </p:sp>
@@ -10143,10 +10266,10 @@
             </a:r>
           </a:p>
           <a:p>
-            <a:pPr marL="557212" lvl="2" indent="-257175"/>
-            <a:r>
-              <a:rPr lang="pt-BR" sz="2100" dirty="0"/>
-              <a:t>-x=10000000</a:t>
+            <a:pPr lvl="1"/>
+            <a:r>
+              <a:rPr lang="pt-BR" dirty="0"/>
+              <a:t>-x = 10000000</a:t>
             </a:r>
           </a:p>
           <a:p>
@@ -10356,13 +10479,13 @@
         </p:nvSpPr>
         <p:spPr>
           <a:xfrm>
-            <a:off x="1981200" y="1219201"/>
-            <a:ext cx="8229600" cy="3962399"/>
+            <a:off x="609600" y="1219201"/>
+            <a:ext cx="10972800" cy="3962399"/>
           </a:xfrm>
         </p:spPr>
         <p:txBody>
           <a:bodyPr>
-            <a:normAutofit fontScale="77500" lnSpcReduction="20000"/>
+            <a:normAutofit fontScale="92500" lnSpcReduction="20000"/>
           </a:bodyPr>
           <a:lstStyle/>
           <a:p>
@@ -10514,11 +10637,17 @@
           <p:cNvGraphicFramePr>
             <a:graphicFrameLocks noGrp="1"/>
           </p:cNvGraphicFramePr>
-          <p:nvPr/>
+          <p:nvPr>
+            <p:extLst>
+              <p:ext uri="{D42A27DB-BD31-4B8C-83A1-F6EECF244321}">
+                <p14:modId xmlns:p14="http://schemas.microsoft.com/office/powerpoint/2010/main" val="4117508349"/>
+              </p:ext>
+            </p:extLst>
+          </p:nvPr>
         </p:nvGraphicFramePr>
         <p:xfrm>
-          <a:off x="4648200" y="5131585"/>
-          <a:ext cx="3276600" cy="1478280"/>
+          <a:off x="4457700" y="4953000"/>
+          <a:ext cx="3276600" cy="1584960"/>
         </p:xfrm>
         <a:graphic>
           <a:graphicData uri="http://schemas.openxmlformats.org/drawingml/2006/table">
@@ -10556,7 +10685,7 @@
                     <a:lstStyle/>
                     <a:p>
                       <a:pPr algn="ctr"/>
-                      <a:endParaRPr lang="en-US" sz="1800" dirty="0"/>
+                      <a:endParaRPr lang="en-US" sz="2000" dirty="0"/>
                     </a:p>
                   </a:txBody>
                   <a:tcPr>
@@ -10574,10 +10703,10 @@
                     <a:p>
                       <a:pPr algn="ctr"/>
                       <a:r>
-                        <a:rPr lang="en-US" sz="1800"/>
+                        <a:rPr lang="en-US" sz="2000"/>
                         <a:t>uint</a:t>
                       </a:r>
-                      <a:endParaRPr lang="en-US" sz="1800" dirty="0"/>
+                      <a:endParaRPr lang="en-US" sz="2000" dirty="0"/>
                     </a:p>
                   </a:txBody>
                   <a:tcPr>
@@ -10595,7 +10724,7 @@
                     <a:p>
                       <a:pPr algn="ctr"/>
                       <a:r>
-                        <a:rPr lang="en-US" sz="1800" dirty="0"/>
+                        <a:rPr lang="en-US" sz="2000" dirty="0"/>
                         <a:t>Int</a:t>
                       </a:r>
                     </a:p>
@@ -10638,13 +10767,13 @@
                         <a:defRPr/>
                       </a:pPr>
                       <a:r>
-                        <a:rPr lang="en-US" sz="1800">
+                        <a:rPr lang="en-US" sz="2000">
                           <a:latin typeface="Tahoma" pitchFamily="34" charset="0"/>
                           <a:cs typeface="Times New Roman" pitchFamily="18" charset="0"/>
                         </a:rPr>
                         <a:t>10100111</a:t>
                       </a:r>
-                      <a:endParaRPr lang="en-US" sz="1800" dirty="0"/>
+                      <a:endParaRPr lang="en-US" sz="2000" dirty="0"/>
                     </a:p>
                   </a:txBody>
                   <a:tcPr/>
@@ -10656,10 +10785,10 @@
                     <a:p>
                       <a:pPr algn="ctr"/>
                       <a:r>
-                        <a:rPr lang="en-US" sz="1800"/>
+                        <a:rPr lang="en-US" sz="2000"/>
                         <a:t>167</a:t>
                       </a:r>
-                      <a:endParaRPr lang="en-US" sz="1800" dirty="0"/>
+                      <a:endParaRPr lang="en-US" sz="2000" dirty="0"/>
                     </a:p>
                   </a:txBody>
                   <a:tcPr/>
@@ -10671,10 +10800,10 @@
                     <a:p>
                       <a:pPr algn="ctr"/>
                       <a:r>
-                        <a:rPr lang="en-US" sz="1800"/>
+                        <a:rPr lang="en-US" sz="2000"/>
                         <a:t>-89</a:t>
                       </a:r>
-                      <a:endParaRPr lang="en-US" sz="1800" dirty="0"/>
+                      <a:endParaRPr lang="en-US" sz="2000" dirty="0"/>
                     </a:p>
                   </a:txBody>
                   <a:tcPr/>
@@ -10709,13 +10838,13 @@
                         <a:defRPr/>
                       </a:pPr>
                       <a:r>
-                        <a:rPr lang="en-US" sz="1800">
+                        <a:rPr lang="en-US" sz="2000">
                           <a:latin typeface="Tahoma" pitchFamily="34" charset="0"/>
                           <a:cs typeface="Times New Roman" pitchFamily="18" charset="0"/>
                         </a:rPr>
                         <a:t>11100001</a:t>
                       </a:r>
-                      <a:endParaRPr lang="en-US" sz="1800" dirty="0"/>
+                      <a:endParaRPr lang="en-US" sz="2000" dirty="0"/>
                     </a:p>
                   </a:txBody>
                   <a:tcPr/>
@@ -10727,10 +10856,10 @@
                     <a:p>
                       <a:pPr algn="ctr"/>
                       <a:r>
-                        <a:rPr lang="en-US" sz="1800"/>
+                        <a:rPr lang="en-US" sz="2000"/>
                         <a:t>225</a:t>
                       </a:r>
-                      <a:endParaRPr lang="en-US" sz="1800" dirty="0"/>
+                      <a:endParaRPr lang="en-US" sz="2000" dirty="0"/>
                     </a:p>
                   </a:txBody>
                   <a:tcPr/>
@@ -10742,7 +10871,7 @@
                     <a:p>
                       <a:pPr algn="ctr"/>
                       <a:r>
-                        <a:rPr lang="en-US" sz="1800" dirty="0"/>
+                        <a:rPr lang="en-US" sz="2000" dirty="0"/>
                         <a:t>-31</a:t>
                       </a:r>
                     </a:p>
@@ -10779,13 +10908,13 @@
                         <a:defRPr/>
                       </a:pPr>
                       <a:r>
-                        <a:rPr lang="en-US" sz="1800">
+                        <a:rPr lang="en-US" sz="2000" dirty="0">
                           <a:latin typeface="Tahoma" pitchFamily="34" charset="0"/>
                           <a:cs typeface="Times New Roman" pitchFamily="18" charset="0"/>
                         </a:rPr>
                         <a:t>10000000</a:t>
                       </a:r>
-                      <a:endParaRPr lang="en-US" sz="1800" dirty="0"/>
+                      <a:endParaRPr lang="en-US" sz="2000" dirty="0"/>
                     </a:p>
                   </a:txBody>
                   <a:tcPr/>
@@ -10797,10 +10926,9 @@
                     <a:p>
                       <a:pPr algn="ctr"/>
                       <a:r>
-                        <a:rPr lang="en-US" sz="1800"/>
+                        <a:rPr lang="en-US" sz="2000" dirty="0"/>
                         <a:t>128</a:t>
                       </a:r>
-                      <a:endParaRPr lang="en-US" sz="1800" dirty="0"/>
                     </a:p>
                   </a:txBody>
                   <a:tcPr/>
@@ -10812,7 +10940,7 @@
                     <a:p>
                       <a:pPr algn="ctr"/>
                       <a:r>
-                        <a:rPr lang="en-US" sz="1800" dirty="0"/>
+                        <a:rPr lang="en-US" sz="2000" dirty="0"/>
                         <a:t>-128</a:t>
                       </a:r>
                     </a:p>
@@ -11092,6 +11220,51 @@
                       </p:childTnLst>
                     </p:cTn>
                   </p:par>
+                  <p:par>
+                    <p:cTn id="23" fill="hold">
+                      <p:stCondLst>
+                        <p:cond delay="indefinite"/>
+                      </p:stCondLst>
+                      <p:childTnLst>
+                        <p:par>
+                          <p:cTn id="24" fill="hold">
+                            <p:stCondLst>
+                              <p:cond delay="0"/>
+                            </p:stCondLst>
+                            <p:childTnLst>
+                              <p:par>
+                                <p:cTn id="25" presetID="1" presetClass="entr" presetSubtype="0" fill="hold" nodeType="clickEffect">
+                                  <p:stCondLst>
+                                    <p:cond delay="0"/>
+                                  </p:stCondLst>
+                                  <p:childTnLst>
+                                    <p:set>
+                                      <p:cBhvr>
+                                        <p:cTn id="26" dur="1" fill="hold">
+                                          <p:stCondLst>
+                                            <p:cond delay="0"/>
+                                          </p:stCondLst>
+                                        </p:cTn>
+                                        <p:tgtEl>
+                                          <p:spTgt spid="4"/>
+                                        </p:tgtEl>
+                                        <p:attrNameLst>
+                                          <p:attrName>style.visibility</p:attrName>
+                                        </p:attrNameLst>
+                                      </p:cBhvr>
+                                      <p:to>
+                                        <p:strVal val="visible"/>
+                                      </p:to>
+                                    </p:set>
+                                  </p:childTnLst>
+                                </p:cTn>
+                              </p:par>
+                            </p:childTnLst>
+                          </p:cTn>
+                        </p:par>
+                      </p:childTnLst>
+                    </p:cTn>
+                  </p:par>
                 </p:childTnLst>
               </p:cTn>
               <p:prevCondLst>
@@ -11287,15 +11460,7 @@
             <a:pPr lvl="1"/>
             <a:r>
               <a:rPr lang="en-US" dirty="0"/>
-              <a:t>If signed </a:t>
-            </a:r>
-            <a:r>
-              <a:rPr lang="en-US" dirty="0" err="1"/>
-              <a:t>int</a:t>
-            </a:r>
-            <a:r>
-              <a:rPr lang="en-US" dirty="0"/>
-              <a:t>, then 1001 is -7 (negative of 0111), and 0011 is 3 in decimal, and -3 &lt; 3</a:t>
+              <a:t>If signed int, then 1001 is -7 (negative of 0111), and 0011 is 3 in decimal, and -7 &lt; 3</a:t>
             </a:r>
           </a:p>
           <a:p>

--- a/PPTs/Ch2_Data_Representation_Exercises ANS.pptx
+++ b/PPTs/Ch2_Data_Representation_Exercises ANS.pptx
@@ -151,20 +151,12 @@
 </p:presentation>
 </file>
 
-<file path=ppt/revisionInfo.xml><?xml version="1.0" encoding="utf-8"?>
-<p1510:revInfo xmlns:a="http://schemas.openxmlformats.org/drawingml/2006/main" xmlns:r="http://schemas.openxmlformats.org/officeDocument/2006/relationships" xmlns:p1510="http://schemas.microsoft.com/office/powerpoint/2015/10/main">
-  <p1510:revLst>
-    <p1510:client id="{74E9662D-2748-4411-A048-4BC33D32B5DB}" v="1" dt="2026-02-05T15:08:07.217"/>
-  </p1510:revLst>
-</p1510:revInfo>
-</file>
-
 <file path=ppt/changesInfos/changesInfo1.xml><?xml version="1.0" encoding="utf-8"?>
 <pc:chgInfo xmlns:a="http://schemas.openxmlformats.org/drawingml/2006/main" xmlns:r="http://schemas.openxmlformats.org/officeDocument/2006/relationships" xmlns:ac="http://schemas.microsoft.com/office/drawing/2013/main/command" xmlns:pc="http://schemas.microsoft.com/office/powerpoint/2013/main/command">
   <pc:docChgLst>
     <pc:chgData name="Zonghua Gu" userId="9a7e1853e1951ef5" providerId="LiveId" clId="{CF1FAA12-072C-4ED5-BA76-0FFFAEFDB88A}"/>
-    <pc:docChg chg="modSld">
-      <pc:chgData name="Zonghua Gu" userId="9a7e1853e1951ef5" providerId="LiveId" clId="{CF1FAA12-072C-4ED5-BA76-0FFFAEFDB88A}" dt="2026-02-05T15:08:07.216" v="2"/>
+    <pc:docChg chg="custSel modSld">
+      <pc:chgData name="Zonghua Gu" userId="9a7e1853e1951ef5" providerId="LiveId" clId="{CF1FAA12-072C-4ED5-BA76-0FFFAEFDB88A}" dt="2026-02-05T15:36:01.574" v="83" actId="20577"/>
       <pc:docMkLst>
         <pc:docMk/>
       </pc:docMkLst>
@@ -198,6 +190,36 @@
           </ac:graphicFrameMkLst>
         </pc:graphicFrameChg>
       </pc:sldChg>
+      <pc:sldChg chg="modSp mod">
+        <pc:chgData name="Zonghua Gu" userId="9a7e1853e1951ef5" providerId="LiveId" clId="{CF1FAA12-072C-4ED5-BA76-0FFFAEFDB88A}" dt="2026-02-05T15:36:01.574" v="83" actId="20577"/>
+        <pc:sldMkLst>
+          <pc:docMk/>
+          <pc:sldMk cId="1834379896" sldId="375"/>
+        </pc:sldMkLst>
+        <pc:spChg chg="mod">
+          <ac:chgData name="Zonghua Gu" userId="9a7e1853e1951ef5" providerId="LiveId" clId="{CF1FAA12-072C-4ED5-BA76-0FFFAEFDB88A}" dt="2026-02-05T15:36:01.574" v="83" actId="20577"/>
+          <ac:spMkLst>
+            <pc:docMk/>
+            <pc:sldMk cId="1834379896" sldId="375"/>
+            <ac:spMk id="4" creationId="{00000000-0000-0000-0000-000000000000}"/>
+          </ac:spMkLst>
+        </pc:spChg>
+      </pc:sldChg>
+      <pc:sldChg chg="modSp mod">
+        <pc:chgData name="Zonghua Gu" userId="9a7e1853e1951ef5" providerId="LiveId" clId="{CF1FAA12-072C-4ED5-BA76-0FFFAEFDB88A}" dt="2026-02-05T15:29:50.571" v="3" actId="20577"/>
+        <pc:sldMkLst>
+          <pc:docMk/>
+          <pc:sldMk cId="811871471" sldId="380"/>
+        </pc:sldMkLst>
+        <pc:spChg chg="mod">
+          <ac:chgData name="Zonghua Gu" userId="9a7e1853e1951ef5" providerId="LiveId" clId="{CF1FAA12-072C-4ED5-BA76-0FFFAEFDB88A}" dt="2026-02-05T15:29:50.571" v="3" actId="20577"/>
+          <ac:spMkLst>
+            <pc:docMk/>
+            <pc:sldMk cId="811871471" sldId="380"/>
+            <ac:spMk id="4" creationId="{00000000-0000-0000-0000-000000000000}"/>
+          </ac:spMkLst>
+        </pc:spChg>
+      </pc:sldChg>
     </pc:docChg>
   </pc:docChgLst>
 </pc:chgInfo>
@@ -286,7 +308,7 @@
             <a:fld id="{BD4F56A7-3CDE-194F-B9AF-D598FBBF1989}" type="datetimeFigureOut">
               <a:rPr lang="en-US" smtClean="0"/>
               <a:pPr/>
-              <a:t>2/5/2026</a:t>
+              <a:t>2/10/2026</a:t>
             </a:fld>
             <a:endParaRPr lang="en-US"/>
           </a:p>
@@ -454,7 +476,7 @@
             <a:fld id="{1E52AD58-60CE-E948-9CBA-0BD7030FC28E}" type="datetimeFigureOut">
               <a:rPr lang="en-US" smtClean="0"/>
               <a:pPr/>
-              <a:t>2/5/2026</a:t>
+              <a:t>2/10/2026</a:t>
             </a:fld>
             <a:endParaRPr lang="en-US"/>
           </a:p>
@@ -1700,7 +1722,7 @@
             <a:pPr eaLnBrk="1" latinLnBrk="0" hangingPunct="1"/>
             <a:fld id="{8E8B2B42-CBC2-7D4E-BA50-0E7F29B4DAAB}" type="datetime1">
               <a:rPr lang="en-US" smtClean="0"/>
-              <a:t>2/5/2026</a:t>
+              <a:t>2/10/2026</a:t>
             </a:fld>
             <a:endParaRPr lang="en-US" sz="1600" dirty="0"/>
           </a:p>
@@ -2060,7 +2082,7 @@
             <a:pPr eaLnBrk="1" latinLnBrk="0" hangingPunct="1"/>
             <a:fld id="{597D1259-3A46-254C-ADDB-B5DA4F1DF3DA}" type="datetime1">
               <a:rPr lang="en-US" smtClean="0"/>
-              <a:t>2/5/2026</a:t>
+              <a:t>2/10/2026</a:t>
             </a:fld>
             <a:endParaRPr lang="en-US"/>
           </a:p>
@@ -2236,7 +2258,7 @@
             <a:pPr eaLnBrk="1" latinLnBrk="0" hangingPunct="1"/>
             <a:fld id="{CCA104EC-54AA-E04F-BDC0-22B4E8892699}" type="datetime1">
               <a:rPr lang="en-US" smtClean="0"/>
-              <a:t>2/5/2026</a:t>
+              <a:t>2/10/2026</a:t>
             </a:fld>
             <a:endParaRPr lang="en-US"/>
           </a:p>
@@ -2472,7 +2494,7 @@
             <a:pPr eaLnBrk="1" latinLnBrk="0" hangingPunct="1"/>
             <a:fld id="{A9E6F060-20EB-3246-9088-08BF5F1271DE}" type="datetime1">
               <a:rPr lang="en-US" smtClean="0"/>
-              <a:t>2/5/2026</a:t>
+              <a:t>2/10/2026</a:t>
             </a:fld>
             <a:endParaRPr lang="en-US" dirty="0"/>
           </a:p>
@@ -2742,7 +2764,7 @@
             <a:pPr eaLnBrk="1" latinLnBrk="0" hangingPunct="1"/>
             <a:fld id="{34C82E41-DA7E-CA4C-823B-C759BEA16CE8}" type="datetime1">
               <a:rPr lang="en-US" smtClean="0"/>
-              <a:t>2/5/2026</a:t>
+              <a:t>2/10/2026</a:t>
             </a:fld>
             <a:endParaRPr lang="en-US" dirty="0"/>
           </a:p>
@@ -2963,7 +2985,7 @@
             <a:pPr eaLnBrk="1" latinLnBrk="0" hangingPunct="1"/>
             <a:fld id="{2500C8B0-EB1A-0A41-B839-C4B99CD2225A}" type="datetime1">
               <a:rPr lang="en-US" smtClean="0"/>
-              <a:t>2/5/2026</a:t>
+              <a:t>2/10/2026</a:t>
             </a:fld>
             <a:endParaRPr lang="en-US"/>
           </a:p>
@@ -3316,7 +3338,7 @@
             <a:pPr eaLnBrk="1" latinLnBrk="0" hangingPunct="1"/>
             <a:fld id="{4F16605B-D952-1149-A111-28A5633BAE48}" type="datetime1">
               <a:rPr lang="en-US" smtClean="0"/>
-              <a:t>2/5/2026</a:t>
+              <a:t>2/10/2026</a:t>
             </a:fld>
             <a:endParaRPr lang="en-US"/>
           </a:p>
@@ -3549,7 +3571,7 @@
             <a:pPr eaLnBrk="1" latinLnBrk="0" hangingPunct="1"/>
             <a:fld id="{91109A1C-29B2-B04E-8365-C9D22C4AE842}" type="datetime1">
               <a:rPr lang="en-US" smtClean="0"/>
-              <a:t>2/5/2026</a:t>
+              <a:t>2/10/2026</a:t>
             </a:fld>
             <a:endParaRPr lang="en-US"/>
           </a:p>
@@ -3691,7 +3713,7 @@
             <a:pPr eaLnBrk="1" latinLnBrk="0" hangingPunct="1"/>
             <a:fld id="{2CE417B6-A42B-064A-8677-46C55C4F613A}" type="datetime1">
               <a:rPr lang="en-US" smtClean="0"/>
-              <a:t>2/5/2026</a:t>
+              <a:t>2/10/2026</a:t>
             </a:fld>
             <a:endParaRPr lang="en-US"/>
           </a:p>
@@ -3969,7 +3991,7 @@
             <a:pPr eaLnBrk="1" latinLnBrk="0" hangingPunct="1"/>
             <a:fld id="{DE76F5AD-3F1F-7141-BC8A-012C5728BE2D}" type="datetime1">
               <a:rPr lang="en-US" smtClean="0"/>
-              <a:t>2/5/2026</a:t>
+              <a:t>2/10/2026</a:t>
             </a:fld>
             <a:endParaRPr lang="en-US"/>
           </a:p>
@@ -4377,7 +4399,7 @@
             <a:pPr eaLnBrk="1" latinLnBrk="0" hangingPunct="1"/>
             <a:fld id="{09FA12B8-739E-4D47-A14C-180C3BC10865}" type="datetime1">
               <a:rPr lang="en-US" smtClean="0"/>
-              <a:t>2/5/2026</a:t>
+              <a:t>2/10/2026</a:t>
             </a:fld>
             <a:endParaRPr lang="en-US"/>
           </a:p>
@@ -4715,7 +4737,7 @@
             <a:pPr eaLnBrk="1" latinLnBrk="0" hangingPunct="1"/>
             <a:fld id="{CDD18CD8-E404-844E-A4BD-DF69B8E5881E}" type="datetime1">
               <a:rPr lang="en-US" smtClean="0"/>
-              <a:t>2/5/2026</a:t>
+              <a:t>2/10/2026</a:t>
             </a:fld>
             <a:endParaRPr lang="en-US" sz="1400" dirty="0">
               <a:solidFill>
@@ -5539,7 +5561,7 @@
               <a:pPr defTabSz="342900">
                 <a:defRPr/>
               </a:pPr>
-              <a:t>2/5/2026</a:t>
+              <a:t>2/10/2026</a:t>
             </a:fld>
             <a:endParaRPr lang="en-US" sz="900">
               <a:solidFill>
@@ -6100,7 +6122,7 @@
               <a:pPr defTabSz="342900">
                 <a:defRPr/>
               </a:pPr>
-              <a:t>2/5/2026</a:t>
+              <a:t>2/10/2026</a:t>
             </a:fld>
             <a:endParaRPr lang="en-US" sz="900">
               <a:solidFill>
@@ -7123,7 +7145,7 @@
               <a:pPr defTabSz="342900">
                 <a:defRPr/>
               </a:pPr>
-              <a:t>2/5/2026</a:t>
+              <a:t>2/10/2026</a:t>
             </a:fld>
             <a:endParaRPr lang="en-US" sz="900">
               <a:solidFill>
@@ -7690,7 +7712,7 @@
               <a:pPr defTabSz="342900">
                 <a:defRPr/>
               </a:pPr>
-              <a:t>2/5/2026</a:t>
+              <a:t>2/10/2026</a:t>
             </a:fld>
             <a:endParaRPr lang="en-US" sz="900">
               <a:solidFill>
@@ -9258,7 +9280,7 @@
             </a:r>
             <a:r>
               <a:rPr lang="en-US" dirty="0"/>
-              <a:t>1011-0110 = 0101 (carry bit discarded), so the computed result is 0101 (5 in decimal) for both cases. </a:t>
+              <a:t>1011-0110 = 0101, so the computed result is 0101 (5 in decimal) for both cases. </a:t>
             </a:r>
           </a:p>
           <a:p>
@@ -9959,9 +9981,28 @@
               <a:rPr lang="en-US" altLang="zh-CN" dirty="0"/>
               <a:t>[-8, 7] for a 4-bit system</a:t>
             </a:r>
+          </a:p>
+          <a:p>
+            <a:pPr lvl="1"/>
+            <a:r>
+              <a:rPr lang="en-US" dirty="0">
+                <a:solidFill>
+                  <a:schemeClr val="tx1"/>
+                </a:solidFill>
+              </a:rPr>
+              <a:t>e.g., for a 4-bit system, the range of signed int is [-8, 7], the range of unsigned int is [0</a:t>
+            </a:r>
+            <a:r>
+              <a:rPr lang="en-US">
+                <a:solidFill>
+                  <a:schemeClr val="tx1"/>
+                </a:solidFill>
+              </a:rPr>
+              <a:t>, 15]</a:t>
+            </a:r>
             <a:endParaRPr lang="en-US" dirty="0">
               <a:solidFill>
-                <a:srgbClr val="FF0000"/>
+                <a:schemeClr val="tx1"/>
               </a:solidFill>
             </a:endParaRPr>
           </a:p>
